--- a/public/level4/downloads/slides/Level4_Lesson7_Slides.pptx
+++ b/public/level4/downloads/slides/Level4_Lesson7_Slides.pptx
@@ -1181,7 +1181,7 @@
           </a:p>
           <a:p>
             <a:r>
-              <a:t>No speaker? Read the script with a volunteer at a natural, friendly speed, two times. Say gonna and wanna where the script has them.</a:t>
+              <a:t>No speaker? Read the script with a volunteer at a natural, friendly speed, two times. The script says going to and want to. People often say gonna and wanna; learners only need to recognize those words.</a:t>
             </a:r>
           </a:p>
           <a:p>
@@ -1216,7 +1216,7 @@
           </a:p>
           <a:p>
             <a:r>
-              <a:t>Carmen: Sure, Nadia. What do you wanna know?</a:t>
+              <a:t>Carmen: Sure, Nadia. What do you want to know?</a:t>
             </a:r>
           </a:p>
           <a:p>
@@ -1266,7 +1266,7 @@
           </a:p>
           <a:p>
             <a:r>
-              <a:t>Nadia: I'm sorry. I didn't know. I'm gonna buy some today.</a:t>
+              <a:t>Nadia: I'm sorry. I didn't know. I'm going to buy some today.</a:t>
             </a:r>
           </a:p>
           <a:p>
@@ -1611,12 +1611,12 @@
           <a:lstStyle/>
           <a:p>
             <a:r>
-              <a:t>"Hear it, say it" (3 min): Point to the script lines. wanna = want to: "What do you wanna know?" gonna = going to: "I'm gonna buy some today." Then practice too / two / to (the same sound) and the stress in TOO late and not eNOUGH. The class repeats the two lines twice.</a:t>
-            </a:r>
-          </a:p>
-          <a:p>
-            <a:r>
-              <a:t>Reductions: the listening has gonna and wanna. Learners need to understand them; they can always say going to and want to.</a:t>
+              <a:t>"Hear it, say it" (3 min): Point to the script lines. wanna = want to: "What do you want to know?" gonna = going to: "I'm going to buy some today." Then practice too / two / to (the same sound) and the stress in TOO late and not eNOUGH. The class repeats the two lines twice.</a:t>
+            </a:r>
+          </a:p>
+          <a:p>
+            <a:r>
+              <a:t>Reductions: the listening says going to and want to. People often say gonna and wanna. Learners only need to recognize the short forms.</a:t>
             </a:r>
           </a:p>
           <a:p>
@@ -16559,6 +16559,17 @@
               <a:buNone/>
             </a:pPr>
             <a:r>
+              <a:rPr lang="en-US" sz="2000" dirty="0" b="1">
+                <a:solidFill>
+                  <a:srgbClr val="5B3FC4"/>
+                </a:solidFill>
+                <a:latin typeface="Lexend Deca" pitchFamily="34" charset="0"/>
+                <a:ea typeface="Lexend Deca" pitchFamily="34" charset="-122"/>
+                <a:cs typeface="Lexend Deca" pitchFamily="34" charset="-120"/>
+              </a:rPr>
+              <a:t>gonna</a:t>
+            </a:r>
+            <a:r>
               <a:rPr lang="en-US" sz="2000" dirty="0">
                 <a:solidFill>
                   <a:srgbClr val="1B2236"/>
@@ -16567,7 +16578,7 @@
                 <a:ea typeface="Lexend Deca" pitchFamily="34" charset="-122"/>
                 <a:cs typeface="Lexend Deca" pitchFamily="34" charset="-120"/>
               </a:rPr>
-              <a:t>You will hear </a:t>
+              <a:t> and </a:t>
             </a:r>
             <a:r>
               <a:rPr lang="en-US" sz="2000" dirty="0" b="1">
@@ -16578,7 +16589,7 @@
                 <a:ea typeface="Lexend Deca" pitchFamily="34" charset="-122"/>
                 <a:cs typeface="Lexend Deca" pitchFamily="34" charset="-120"/>
               </a:rPr>
-              <a:t>gonna</a:t>
+              <a:t>wanna</a:t>
             </a:r>
             <a:r>
               <a:rPr lang="en-US" sz="2000" dirty="0">
@@ -16589,29 +16600,7 @@
                 <a:ea typeface="Lexend Deca" pitchFamily="34" charset="-122"/>
                 <a:cs typeface="Lexend Deca" pitchFamily="34" charset="-120"/>
               </a:rPr>
-              <a:t> and </a:t>
-            </a:r>
-            <a:r>
-              <a:rPr lang="en-US" sz="2000" dirty="0" b="1">
-                <a:solidFill>
-                  <a:srgbClr val="5B3FC4"/>
-                </a:solidFill>
-                <a:latin typeface="Lexend Deca" pitchFamily="34" charset="0"/>
-                <a:ea typeface="Lexend Deca" pitchFamily="34" charset="-122"/>
-                <a:cs typeface="Lexend Deca" pitchFamily="34" charset="-120"/>
-              </a:rPr>
-              <a:t>wanna</a:t>
-            </a:r>
-            <a:r>
-              <a:rPr lang="en-US" sz="2000" dirty="0">
-                <a:solidFill>
-                  <a:srgbClr val="1B2236"/>
-                </a:solidFill>
-                <a:latin typeface="Lexend Deca" pitchFamily="34" charset="0"/>
-                <a:ea typeface="Lexend Deca" pitchFamily="34" charset="-122"/>
-                <a:cs typeface="Lexend Deca" pitchFamily="34" charset="-120"/>
-              </a:rPr>
-              <a:t>.</a:t>
+              <a:t> are short forms. This listening uses the full forms.</a:t>
             </a:r>
             <a:endParaRPr lang="en-US" sz="2000" dirty="0"/>
           </a:p>
@@ -16799,7 +16788,7 @@
                 <a:ea typeface="Lexend Deca" pitchFamily="34" charset="-122"/>
                 <a:cs typeface="Lexend Deca" pitchFamily="34" charset="-120"/>
               </a:rPr>
-              <a:t>wanna</a:t>
+              <a:t>want to</a:t>
             </a:r>
             <a:r>
               <a:rPr lang="en-US" sz="1800" dirty="0" b="1">
@@ -16886,7 +16875,7 @@
                 <a:ea typeface="Lexend Deca" pitchFamily="34" charset="-122"/>
                 <a:cs typeface="Lexend Deca" pitchFamily="34" charset="-120"/>
               </a:rPr>
-              <a:t>gonna</a:t>
+              <a:t>going to</a:t>
             </a:r>
             <a:r>
               <a:rPr lang="en-US" sz="1800" dirty="0" b="1">

--- a/public/level4/downloads/slides/Level4_Lesson7_Slides.pptx
+++ b/public/level4/downloads/slides/Level4_Lesson7_Slides.pptx
@@ -1176,7 +1176,7 @@
           </a:p>
           <a:p>
             <a:r>
-              <a:t>The audio (about 1:50) is coming soon. When it is ready, it plays the conversation once; press play again for play 2. Until then, read the listening script (at the end of these notes) with a volunteer.</a:t>
+              <a:t>The audio (L4_L7_listening.mp3, about 1:52) plays the conversation once. Press play again for play 2. A third play is fine if the class needs it.</a:t>
             </a:r>
           </a:p>
           <a:p>
@@ -1186,7 +1186,7 @@
           </a:p>
           <a:p>
             <a:r>
-              <a:t>Audio: the listening audio for this lesson (about 1:50) is coming soon. It will use computer-generated voices (Chatterbox TTS cloned from synthetic Kokoro-82M reference clips); no recordings of real people. Until it is ready, read the listening script (in the notes of the Before You Listen slide) with a volunteer. The names and the story are invented.</a:t>
+              <a:t>Audio: synthetic voices, computer-generated (Chatterbox TTS cloned from Kokoro-82M reference clips). No recordings of real people. The names and the story are invented.</a:t>
             </a:r>
           </a:p>
           <a:p>
@@ -1197,106 +1197,6 @@
           <a:p>
             <a:r>
               <a:t>Picture: Twemoji graphics by Twitter, Inc. and other contributors (https://github.com/jdecked/twemoji), CC BY 4.0 (https://creativecommons.org/licenses/by/4.0/); resized and combined, with signs and labels (images/CREDITS.md).</a:t>
-            </a:r>
-          </a:p>
-          <a:p>
-            <a:r>
-              <a:t>Listening script (the audio is coming soon; until then, read it aloud with a volunteer at a normal, friendly speed):</a:t>
-            </a:r>
-          </a:p>
-          <a:p>
-            <a:r>
-              <a:t>Narrator: Lesson seven. It's Nadia's first week at a bakery. She asks her coworker, Carmen, some questions.</a:t>
-            </a:r>
-          </a:p>
-          <a:p>
-            <a:r>
-              <a:t>Nadia: Carmen, can I ask you a few questions? I'm still learning the rules.</a:t>
-            </a:r>
-          </a:p>
-          <a:p>
-            <a:r>
-              <a:t>Carmen: Sure, Nadia. What do you want to know?</a:t>
-            </a:r>
-          </a:p>
-          <a:p>
-            <a:r>
-              <a:t>Nadia: My shift starts at seven. Is six fifty-five early enough?</a:t>
-            </a:r>
-          </a:p>
-          <a:p>
-            <a:r>
-              <a:t>Carmen: Yes, that's perfect. Here, on time means five minutes early. Seven ten is too late.</a:t>
-            </a:r>
-          </a:p>
-          <a:p>
-            <a:r>
-              <a:t>Nadia: OK. And what about the uniform? Do I have to wear the hat?</a:t>
-            </a:r>
-          </a:p>
-          <a:p>
-            <a:r>
-              <a:t>Carmen: Yes, you must wear the hat and the apron in the kitchen. But you don't have to wear them in the break room.</a:t>
-            </a:r>
-          </a:p>
-          <a:p>
-            <a:r>
-              <a:t>Nadia: Got it. What about my phone?</a:t>
-            </a:r>
-          </a:p>
-          <a:p>
-            <a:r>
-              <a:t>Carmen: You mustn't use your phone in the kitchen. You can use it on your break.</a:t>
-            </a:r>
-          </a:p>
-          <a:p>
-            <a:r>
-              <a:t>Nadia: And are these shoes OK? They're new.</a:t>
-            </a:r>
-          </a:p>
-          <a:p>
-            <a:r>
-              <a:t>Carmen: Hmm, those are sandals. They aren't safe enough for the kitchen.</a:t>
-            </a:r>
-          </a:p>
-          <a:p>
-            <a:r>
-              <a:t>Mr. Brooks: Carmen's right. Good morning, Nadia. I'm Mr. Brooks, the supervisor. You must wear closed-toe shoes. The trays are too hot, and the floor is sometimes wet.</a:t>
-            </a:r>
-          </a:p>
-          <a:p>
-            <a:r>
-              <a:t>Nadia: I'm sorry. I didn't know. I'm going to buy some today.</a:t>
-            </a:r>
-          </a:p>
-          <a:p>
-            <a:r>
-              <a:t>Mr. Brooks: That's OK. For today, there are extra shoes in the office. Maybe they're too big, but they're safe.</a:t>
-            </a:r>
-          </a:p>
-          <a:p>
-            <a:r>
-              <a:t>Nadia: Thank you. Is there anything else?</a:t>
-            </a:r>
-          </a:p>
-          <a:p>
-            <a:r>
-              <a:t>Mr. Brooks: Just one more thing. If you're going to be late, you must call me before your shift.</a:t>
-            </a:r>
-          </a:p>
-          <a:p>
-            <a:r>
-              <a:t>Carmen: Don't worry, Nadia. Everyone makes mistakes in the first week. There's too much to remember!</a:t>
-            </a:r>
-          </a:p>
-          <a:p>
-            <a:r>
-              <a:t>Nadia: That's true. Thanks, both of you.</a:t>
-            </a:r>
-          </a:p>
-          <a:p>
-            <a:r>
-              <a:t>Narrator: That's the end of the listening.</a:t>
             </a:r>
           </a:p>
         </p:txBody>
@@ -2781,7 +2681,7 @@
           </a:p>
           <a:p>
             <a:r>
-              <a:t>Audio: the listening audio for this lesson (about 1:50) is coming soon. It will use computer-generated voices (Chatterbox TTS cloned from synthetic Kokoro-82M reference clips); no recordings of real people. Until it is ready, read the listening script (in the notes of the Before You Listen slide) with a volunteer. The names and the story are invented.</a:t>
+              <a:t>Audio: synthetic voices, computer-generated (Chatterbox TTS cloned from Kokoro-82M reference clips). No recordings of real people. The names and the story are invented.</a:t>
             </a:r>
           </a:p>
           <a:p>
@@ -12101,7 +12001,7 @@
                 <a:ea typeface="Lexend Deca" pitchFamily="34" charset="-122"/>
                 <a:cs typeface="Lexend Deca" pitchFamily="34" charset="-120"/>
               </a:rPr>
-              <a:t>Audio (about 1:50): coming soon.</a:t>
+              <a:t>Audio: about 1:52. It plays once.</a:t>
             </a:r>
             <a:endParaRPr lang="en-US" sz="2200" dirty="0"/>
           </a:p>
@@ -31613,7 +31513,7 @@
                 <a:ea typeface="Lexend Deca" pitchFamily="34" charset="-122"/>
                 <a:cs typeface="Lexend Deca" pitchFamily="34" charset="-120"/>
               </a:rPr>
-              <a:t>Audio (coming soon): synthetic voices made with Chatterbox TTS (MIT License), cloned from short synthetic reference clips made with Kokoro-82M (Apache License 2.0). No recordings of real people. Each file will carry an inaudible Perth watermark marking it as AI-generated. Font: Lexend Deca (OFL 1.1).</a:t>
+              <a:t>Audio: synthetic voices made with Chatterbox TTS (MIT License), cloned from short synthetic reference clips made with Kokoro-82M (Apache License 2.0). No recordings of real people were used. Each file carries an inaudible Perth watermark marking it as AI-generated. Font: Lexend Deca (OFL 1.1).</a:t>
             </a:r>
             <a:endParaRPr lang="en-US" sz="1350" dirty="0" b="0"/>
           </a:p>

--- a/public/level4/downloads/slides/Level4_Lesson7_Slides.pptx
+++ b/public/level4/downloads/slides/Level4_Lesson7_Slides.pptx
@@ -1517,6 +1517,11 @@
           <a:p>
             <a:r>
               <a:t>Reductions: the listening says going to and want to. People often say gonna and wanna. Learners only need to recognize the short forms.</a:t>
+            </a:r>
+          </a:p>
+          <a:p>
+            <a:r>
+              <a:t>Everyday English: people often say gonna (going to) and wanna (want to). Learners will hear them often. They are fine in casual talk; in writing, at a job interview, or in a formal email, use going to and want to. The listening uses the full forms.</a:t>
             </a:r>
           </a:p>
           <a:p>
@@ -16478,7 +16483,7 @@
                 <a:ea typeface="Lexend Deca" pitchFamily="34" charset="-122"/>
                 <a:cs typeface="Lexend Deca" pitchFamily="34" charset="-120"/>
               </a:rPr>
-              <a:t> and </a:t>
+              <a:t> = going to, </a:t>
             </a:r>
             <a:r>
               <a:rPr lang="en-US" sz="2000" dirty="0" b="1">
@@ -16500,7 +16505,7 @@
                 <a:ea typeface="Lexend Deca" pitchFamily="34" charset="-122"/>
                 <a:cs typeface="Lexend Deca" pitchFamily="34" charset="-120"/>
               </a:rPr>
-              <a:t> are short forms. This listening uses the full forms.</a:t>
+              <a:t> = want to: fine in everyday talk.</a:t>
             </a:r>
             <a:endParaRPr lang="en-US" sz="2000" dirty="0"/>
           </a:p>
